--- a/Studies/How-Undivided-Society-Is-Established/How-Undivided-Society-Is-Established.pptx
+++ b/Studies/How-Undivided-Society-Is-Established/How-Undivided-Society-Is-Established.pptx
@@ -13382,7 +13382,7 @@
                 <a:ea typeface="Cambria"/>
                 <a:cs typeface="Cambria"/>
               </a:rPr>
-              <a:t>Society is humane only when it is undivided. Societal functioning means participation in universal orderliness.</a:t>
+              <a:t>Human society is essentially one undivided society. Societal participation means - participation in the sense of undivided society, i.e., participation in universal orderliness.</a:t>
             </a:r>
           </a:p>
           <a:p xmlns:a="http://schemas.openxmlformats.org/drawingml/2006/main">
@@ -13424,7 +13424,7 @@
                 <a:ea typeface="Calibri"/>
                 <a:cs typeface="Calibri"/>
               </a:rPr>
-              <a:t>— JVD, p. 157</a:t>
+              <a:t>— JVD, p. 151</a:t>
             </a:r>
           </a:p>
         </p:txBody>
